--- a/public/ax-blueprint-slides.pptx
+++ b/public/ax-blueprint-slides.pptx
@@ -3346,8 +3346,8 @@
         </p:blipFill>
         <p:spPr>
           <a:xfrm>
-            <a:off x="2503687" y="850000"/>
-            <a:ext cx="7184626" cy="5608000"/>
+            <a:off x="2708617" y="850000"/>
+            <a:ext cx="6774765" cy="5608000"/>
           </a:xfrm>
           <a:prstGeom prst="rect">
             <a:avLst/>
@@ -5470,8 +5470,8 @@
         </p:blipFill>
         <p:spPr>
           <a:xfrm>
-            <a:off x="2797176" y="850000"/>
-            <a:ext cx="6597647" cy="5608000"/>
+            <a:off x="2980444" y="850000"/>
+            <a:ext cx="6231111" cy="5608000"/>
           </a:xfrm>
           <a:prstGeom prst="rect">
             <a:avLst/>
@@ -6060,8 +6060,8 @@
         </p:blipFill>
         <p:spPr>
           <a:xfrm>
-            <a:off x="2839742" y="850000"/>
-            <a:ext cx="6512516" cy="5608000"/>
+            <a:off x="3018439" y="850000"/>
+            <a:ext cx="6155121" cy="5608000"/>
           </a:xfrm>
           <a:prstGeom prst="rect">
             <a:avLst/>

--- a/public/ax-blueprint-slides.pptx
+++ b/public/ax-blueprint-slides.pptx
@@ -45,6 +45,7 @@
     <p:sldId id="293" r:id="rId44"/>
     <p:sldId id="294" r:id="rId45"/>
     <p:sldId id="295" r:id="rId46"/>
+    <p:sldId id="296" r:id="rId47"/>
   </p:sldIdLst>
   <p:sldSz cx="12192000" cy="6858000" type="screen4x3"/>
   <p:notesSz cx="6858000" cy="9144000"/>
@@ -3582,8 +3583,8 @@
         </p:blipFill>
         <p:spPr>
           <a:xfrm>
-            <a:off x="2644923" y="850000"/>
-            <a:ext cx="6902153" cy="5608000"/>
+            <a:off x="2731200" y="850000"/>
+            <a:ext cx="6729600" cy="5608000"/>
           </a:xfrm>
           <a:prstGeom prst="rect">
             <a:avLst/>
@@ -4880,8 +4881,8 @@
         </p:blipFill>
         <p:spPr>
           <a:xfrm>
-            <a:off x="2490857" y="850000"/>
-            <a:ext cx="7210285" cy="5608000"/>
+            <a:off x="2839742" y="850000"/>
+            <a:ext cx="6512516" cy="5608000"/>
           </a:xfrm>
           <a:prstGeom prst="rect">
             <a:avLst/>
@@ -4977,7 +4978,7 @@
                 </a:solidFill>
                 <a:latin typeface="BIZ UDPGothic"/>
               </a:rPr>
-              <a:t>第21章　汎用技術と生産性 J カーブ</a:t>
+              <a:t>第21章　汎用技術と生産性Jカーブ</a:t>
             </a:r>
           </a:p>
         </p:txBody>
@@ -5234,8 +5235,8 @@
         </p:blipFill>
         <p:spPr>
           <a:xfrm>
-            <a:off x="1890000" y="850000"/>
-            <a:ext cx="8412000" cy="5608000"/>
+            <a:off x="1975837" y="850000"/>
+            <a:ext cx="8240326" cy="5608000"/>
           </a:xfrm>
           <a:prstGeom prst="rect">
             <a:avLst/>
@@ -5706,8 +5707,8 @@
         </p:blipFill>
         <p:spPr>
           <a:xfrm>
-            <a:off x="2490857" y="850000"/>
-            <a:ext cx="7210285" cy="5608000"/>
+            <a:off x="2615172" y="850000"/>
+            <a:ext cx="6961655" cy="5608000"/>
           </a:xfrm>
           <a:prstGeom prst="rect">
             <a:avLst/>
@@ -7004,8 +7005,8 @@
         </p:blipFill>
         <p:spPr>
           <a:xfrm>
-            <a:off x="2941500" y="850000"/>
-            <a:ext cx="6309000" cy="5608000"/>
+            <a:off x="2490857" y="850000"/>
+            <a:ext cx="7210285" cy="5608000"/>
           </a:xfrm>
           <a:prstGeom prst="rect">
             <a:avLst/>
@@ -7173,6 +7174,124 @@
 </file>
 
 <file path=ppt/slides/slide40.xml><?xml version="1.0" encoding="utf-8"?>
+<p:sld xmlns:a="http://schemas.openxmlformats.org/drawingml/2006/main" xmlns:p="http://schemas.openxmlformats.org/presentationml/2006/main" xmlns:r="http://schemas.openxmlformats.org/officeDocument/2006/relationships">
+  <p:cSld>
+    <p:bg>
+      <p:bgPr>
+        <a:solidFill>
+          <a:srgbClr val="FBFAF5"/>
+        </a:solidFill>
+        <a:effectLst/>
+      </p:bgPr>
+    </p:bg>
+    <p:spTree>
+      <p:nvGrpSpPr>
+        <p:cNvPr id="1" name=""/>
+        <p:cNvGrpSpPr/>
+        <p:nvPr/>
+      </p:nvGrpSpPr>
+      <p:grpSpPr/>
+      <p:sp>
+        <p:nvSpPr>
+          <p:cNvPr id="2" name="TextBox 1"/>
+          <p:cNvSpPr txBox="1"/>
+          <p:nvPr/>
+        </p:nvSpPr>
+        <p:spPr>
+          <a:xfrm>
+            <a:off x="500000" y="220000"/>
+            <a:ext cx="11200000" cy="600000"/>
+          </a:xfrm>
+          <a:prstGeom prst="rect">
+            <a:avLst/>
+          </a:prstGeom>
+          <a:noFill/>
+        </p:spPr>
+        <p:txBody>
+          <a:bodyPr wrap="square">
+            <a:spAutoFit/>
+          </a:bodyPr>
+          <a:lstStyle/>
+          <a:p>
+            <a:r>
+              <a:rPr sz="2000" b="0">
+                <a:solidFill>
+                  <a:srgbClr val="686C75"/>
+                </a:solidFill>
+                <a:latin typeface="BIZ UDPGothic"/>
+              </a:rPr>
+              <a:t>第38章　会議資料と90日計画</a:t>
+            </a:r>
+          </a:p>
+        </p:txBody>
+      </p:sp>
+      <p:pic>
+        <p:nvPicPr>
+          <p:cNvPr id="3" name="Picture 2" descr="38-meeting-pack.png"/>
+          <p:cNvPicPr>
+            <a:picLocks noChangeAspect="1"/>
+          </p:cNvPicPr>
+          <p:nvPr/>
+        </p:nvPicPr>
+        <p:blipFill>
+          <a:blip r:embed="rId2"/>
+          <a:stretch>
+            <a:fillRect/>
+          </a:stretch>
+        </p:blipFill>
+        <p:spPr>
+          <a:xfrm>
+            <a:off x="2941500" y="850000"/>
+            <a:ext cx="6309000" cy="5608000"/>
+          </a:xfrm>
+          <a:prstGeom prst="rect">
+            <a:avLst/>
+          </a:prstGeom>
+        </p:spPr>
+      </p:pic>
+      <p:sp>
+        <p:nvSpPr>
+          <p:cNvPr id="4" name="TextBox 3"/>
+          <p:cNvSpPr txBox="1"/>
+          <p:nvPr/>
+        </p:nvSpPr>
+        <p:spPr>
+          <a:xfrm>
+            <a:off x="500000" y="6438000"/>
+            <a:ext cx="11200000" cy="380000"/>
+          </a:xfrm>
+          <a:prstGeom prst="rect">
+            <a:avLst/>
+          </a:prstGeom>
+          <a:noFill/>
+        </p:spPr>
+        <p:txBody>
+          <a:bodyPr wrap="square">
+            <a:spAutoFit/>
+          </a:bodyPr>
+          <a:lstStyle/>
+          <a:p>
+            <a:r>
+              <a:rPr sz="1100" b="0">
+                <a:solidFill>
+                  <a:srgbClr val="686C75"/>
+                </a:solidFill>
+                <a:latin typeface="BIZ UDPGothic"/>
+              </a:rPr>
+              <a:t>出典と詳細: https://zenn.dev/takenori_kusaka/books/ai-transformation-blueprint/viewer/38-meeting-pack</a:t>
+            </a:r>
+          </a:p>
+        </p:txBody>
+      </p:sp>
+    </p:spTree>
+  </p:cSld>
+  <p:clrMapOvr>
+    <a:masterClrMapping/>
+  </p:clrMapOvr>
+</p:sld>
+</file>
+
+<file path=ppt/slides/slide41.xml><?xml version="1.0" encoding="utf-8"?>
 <p:sld xmlns:a="http://schemas.openxmlformats.org/drawingml/2006/main" xmlns:p="http://schemas.openxmlformats.org/presentationml/2006/main" xmlns:r="http://schemas.openxmlformats.org/officeDocument/2006/relationships">
   <p:cSld>
     <p:bg>
@@ -8048,8 +8167,8 @@
         </p:blipFill>
         <p:spPr>
           <a:xfrm>
-            <a:off x="2731200" y="850000"/>
-            <a:ext cx="6729600" cy="5608000"/>
+            <a:off x="2839742" y="850000"/>
+            <a:ext cx="6512516" cy="5608000"/>
           </a:xfrm>
           <a:prstGeom prst="rect">
             <a:avLst/>
